--- a/data-eng/decks/w3d4s0.pptx
+++ b/data-eng/decks/w3d4s0.pptx
@@ -4930,7 +4930,7 @@
                 <a:ea typeface="Pretendard"/>
                 <a:cs typeface="Pretendard"/>
               </a:rPr>
-              <a:t>1 파일 넷</a:t>
+              <a:t>1. 파일 넷</a:t>
             </a:r>
           </a:p>
         </p:txBody>
@@ -5094,7 +5094,7 @@
                 <a:ea typeface="Pretendard"/>
                 <a:cs typeface="Pretendard"/>
               </a:rPr>
-              <a:t>2 venv·판</a:t>
+              <a:t>2. venv·판</a:t>
             </a:r>
           </a:p>
         </p:txBody>
@@ -5258,7 +5258,7 @@
                 <a:ea typeface="Pretendard"/>
                 <a:cs typeface="Pretendard"/>
               </a:rPr>
-              <a:t>3 오늘 만들 것</a:t>
+              <a:t>3. 오늘 만들 것</a:t>
             </a:r>
           </a:p>
         </p:txBody>
@@ -5422,7 +5422,7 @@
                 <a:ea typeface="Pretendard"/>
                 <a:cs typeface="Pretendard"/>
               </a:rPr>
-              <a:t>4 재설정</a:t>
+              <a:t>4. 재설정</a:t>
             </a:r>
           </a:p>
         </p:txBody>
